--- a/clases/PR03_Seleccion_de_Caracteristicas/presentaciones/pptx/PR03_Tarea02_Enunciado.pptx
+++ b/clases/PR03_Seleccion_de_Caracteristicas/presentaciones/pptx/PR03_Tarea02_Enunciado.pptx
@@ -263,7 +263,7 @@
           <a:p>
             <a:fld id="{9E39809B-C788-2348-B845-12B51D68EAA0}" type="datetimeFigureOut">
               <a:rPr lang="en-CL" smtClean="0"/>
-              <a:t>08-10-26</a:t>
+              <a:t>13-10-26</a:t>
             </a:fld>
             <a:endParaRPr lang="en-CL"/>
           </a:p>
@@ -463,7 +463,7 @@
           <a:p>
             <a:fld id="{9E39809B-C788-2348-B845-12B51D68EAA0}" type="datetimeFigureOut">
               <a:rPr lang="en-CL" smtClean="0"/>
-              <a:t>08-10-26</a:t>
+              <a:t>13-10-26</a:t>
             </a:fld>
             <a:endParaRPr lang="en-CL"/>
           </a:p>
@@ -673,7 +673,7 @@
           <a:p>
             <a:fld id="{9E39809B-C788-2348-B845-12B51D68EAA0}" type="datetimeFigureOut">
               <a:rPr lang="en-CL" smtClean="0"/>
-              <a:t>08-10-26</a:t>
+              <a:t>13-10-26</a:t>
             </a:fld>
             <a:endParaRPr lang="en-CL"/>
           </a:p>
@@ -873,7 +873,7 @@
           <a:p>
             <a:fld id="{9E39809B-C788-2348-B845-12B51D68EAA0}" type="datetimeFigureOut">
               <a:rPr lang="en-CL" smtClean="0"/>
-              <a:t>08-10-26</a:t>
+              <a:t>13-10-26</a:t>
             </a:fld>
             <a:endParaRPr lang="en-CL"/>
           </a:p>
@@ -1149,7 +1149,7 @@
           <a:p>
             <a:fld id="{9E39809B-C788-2348-B845-12B51D68EAA0}" type="datetimeFigureOut">
               <a:rPr lang="en-CL" smtClean="0"/>
-              <a:t>08-10-26</a:t>
+              <a:t>13-10-26</a:t>
             </a:fld>
             <a:endParaRPr lang="en-CL"/>
           </a:p>
@@ -1417,7 +1417,7 @@
           <a:p>
             <a:fld id="{9E39809B-C788-2348-B845-12B51D68EAA0}" type="datetimeFigureOut">
               <a:rPr lang="en-CL" smtClean="0"/>
-              <a:t>08-10-26</a:t>
+              <a:t>13-10-26</a:t>
             </a:fld>
             <a:endParaRPr lang="en-CL"/>
           </a:p>
@@ -1832,7 +1832,7 @@
           <a:p>
             <a:fld id="{9E39809B-C788-2348-B845-12B51D68EAA0}" type="datetimeFigureOut">
               <a:rPr lang="en-CL" smtClean="0"/>
-              <a:t>08-10-26</a:t>
+              <a:t>13-10-26</a:t>
             </a:fld>
             <a:endParaRPr lang="en-CL"/>
           </a:p>
@@ -1974,7 +1974,7 @@
           <a:p>
             <a:fld id="{9E39809B-C788-2348-B845-12B51D68EAA0}" type="datetimeFigureOut">
               <a:rPr lang="en-CL" smtClean="0"/>
-              <a:t>08-10-26</a:t>
+              <a:t>13-10-26</a:t>
             </a:fld>
             <a:endParaRPr lang="en-CL"/>
           </a:p>
@@ -2087,7 +2087,7 @@
           <a:p>
             <a:fld id="{9E39809B-C788-2348-B845-12B51D68EAA0}" type="datetimeFigureOut">
               <a:rPr lang="en-CL" smtClean="0"/>
-              <a:t>08-10-26</a:t>
+              <a:t>13-10-26</a:t>
             </a:fld>
             <a:endParaRPr lang="en-CL"/>
           </a:p>
@@ -2400,7 +2400,7 @@
           <a:p>
             <a:fld id="{9E39809B-C788-2348-B845-12B51D68EAA0}" type="datetimeFigureOut">
               <a:rPr lang="en-CL" smtClean="0"/>
-              <a:t>08-10-26</a:t>
+              <a:t>13-10-26</a:t>
             </a:fld>
             <a:endParaRPr lang="en-CL"/>
           </a:p>
@@ -2689,7 +2689,7 @@
           <a:p>
             <a:fld id="{9E39809B-C788-2348-B845-12B51D68EAA0}" type="datetimeFigureOut">
               <a:rPr lang="en-CL" smtClean="0"/>
-              <a:t>08-10-26</a:t>
+              <a:t>13-10-26</a:t>
             </a:fld>
             <a:endParaRPr lang="en-CL"/>
           </a:p>
@@ -2932,7 +2932,7 @@
           <a:p>
             <a:fld id="{9E39809B-C788-2348-B845-12B51D68EAA0}" type="datetimeFigureOut">
               <a:rPr lang="en-CL" smtClean="0"/>
-              <a:t>08-10-26</a:t>
+              <a:t>13-10-26</a:t>
             </a:fld>
             <a:endParaRPr lang="en-CL"/>
           </a:p>
@@ -3704,8 +3704,8 @@
         </p:nvSpPr>
         <p:spPr>
           <a:xfrm>
-            <a:off x="630936" y="2807208"/>
-            <a:ext cx="3429000" cy="3410712"/>
+            <a:off x="630935" y="2807208"/>
+            <a:ext cx="3908791" cy="3410712"/>
           </a:xfrm>
           <a:prstGeom prst="rect">
             <a:avLst/>
@@ -3713,7 +3713,7 @@
         </p:spPr>
         <p:txBody>
           <a:bodyPr vert="horz" lIns="91440" tIns="45720" rIns="91440" bIns="45720" rtlCol="0">
-            <a:normAutofit fontScale="92500" lnSpcReduction="10000"/>
+            <a:normAutofit fontScale="85000" lnSpcReduction="20000"/>
           </a:bodyPr>
           <a:lstStyle/>
           <a:p>
@@ -3827,6 +3827,46 @@
                 <a:hlinkClick r:id="rId2"/>
               </a:rPr>
               <a:t>https://drive.google.com/file/d/16Zs_DQljQ6Lmtt3HCgsuD1mgABmB0gPU/view?usp=sharing</a:t>
+            </a:r>
+            <a:endParaRPr lang="en-US" sz="2200" dirty="0"/>
+          </a:p>
+          <a:p>
+            <a:pPr indent="-228600">
+              <a:lnSpc>
+                <a:spcPct val="90000"/>
+              </a:lnSpc>
+              <a:spcAft>
+                <a:spcPts val="600"/>
+              </a:spcAft>
+              <a:buFont typeface="Arial" panose="020B0604020202020204" pitchFamily="34" charset="0"/>
+              <a:buChar char="•"/>
+            </a:pPr>
+            <a:endParaRPr lang="en-US" sz="2200" dirty="0"/>
+          </a:p>
+          <a:p>
+            <a:pPr>
+              <a:lnSpc>
+                <a:spcPct val="90000"/>
+              </a:lnSpc>
+              <a:spcAft>
+                <a:spcPts val="600"/>
+              </a:spcAft>
+            </a:pPr>
+            <a:r>
+              <a:rPr lang="en-US" sz="2200" dirty="0"/>
+              <a:t>GitHub &gt; Cap 03 &gt; </a:t>
+            </a:r>
+            <a:r>
+              <a:rPr lang="en-US" sz="2200" dirty="0" err="1"/>
+              <a:t>datos</a:t>
+            </a:r>
+            <a:r>
+              <a:rPr lang="en-US" sz="2200" dirty="0"/>
+              <a:t> &gt; </a:t>
+            </a:r>
+            <a:r>
+              <a:rPr lang="en-US" sz="2200" dirty="0" err="1"/>
+              <a:t>AR.zip</a:t>
             </a:r>
             <a:endParaRPr lang="en-US" sz="2200" dirty="0"/>
           </a:p>
